--- a/QM_Pulse_ROI_Presentation.pptx
+++ b/QM_Pulse_ROI_Presentation.pptx
@@ -191,7 +191,7 @@
                   <c:v>Manual QA</c:v>
                 </c:pt>
                 <c:pt idx="1">
-                  <c:v>QAPulse</c:v>
+                  <c:v>QM Pulse</c:v>
                 </c:pt>
               </c:strCache>
             </c:strRef>
@@ -420,7 +420,7 @@
                   <c:v>Manual QA</c:v>
                 </c:pt>
                 <c:pt idx="1">
-                  <c:v>QAPulse</c:v>
+                  <c:v>QM Pulse</c:v>
                 </c:pt>
               </c:strCache>
             </c:strRef>
@@ -649,7 +649,7 @@
                   <c:v>Manual QA</c:v>
                 </c:pt>
                 <c:pt idx="1">
-                  <c:v>QAPulse</c:v>
+                  <c:v>QM Pulse</c:v>
                 </c:pt>
               </c:strCache>
             </c:strRef>
@@ -878,7 +878,7 @@
                   <c:v>Manual (5 QA)</c:v>
                 </c:pt>
                 <c:pt idx="1">
-                  <c:v>QAPulse (1 QA)</c:v>
+                  <c:v>QM Pulse (1 QA)</c:v>
                 </c:pt>
               </c:strCache>
             </c:strRef>
@@ -1688,7 +1688,7 @@
           </a:p>
           <a:p>
             <a:r>
-              <a:t>"Today I want to walk leadership through the hard numbers behind QAPulse — not just what it does, but what it is worth in Ringgit terms. The short version: one QA analyst using QAPulse produces the same test coverage as five QA analysts working manually, at 20% of the cost per test case, freeing up 80% of that analyst's week for higher-value work."</a:t>
+              <a:t>"Today I want to walk leadership through the hard numbers behind QM Pulse — not just what it does, but what it is worth in Ringgit terms. The short version: one QA analyst using QM Pulse produces the same test coverage as five QA analysts working manually, at 20% of the cost per test case, freeing up 80% of that analyst's week for higher-value work."</a:t>
             </a:r>
           </a:p>
         </p:txBody>
@@ -1763,7 +1763,7 @@
           </a:p>
           <a:p>
             <a:r>
-              <a:t>"Before QAPulse, a QA analyst clears 100 test cases a week — 20 a day, or about 24 minutes of manual effort per test case. That ceiling is fixed. The only lever we have today to test more is to hire more, at RM5,000 a month per head."</a:t>
+              <a:t>"Before QM Pulse, a QA analyst clears 100 test cases a week — 20 a day, or about 24 minutes of manual effort per test case. That ceiling is fixed. The only lever we have today to test more is to hire more, at RM5,000 a month per head."</a:t>
             </a:r>
           </a:p>
         </p:txBody>
@@ -1838,7 +1838,7 @@
           </a:p>
           <a:p>
             <a:r>
-              <a:t>"With QAPulse, the same analyst moves from 20 to 100 test cases a day — a flat 5x multiplier. Over a month that is the difference between 433 and 2165 test cases, with no change in headcount or salary cost."</a:t>
+              <a:t>"With QM Pulse, the same analyst moves from 20 to 100 test cases a day — a flat 5x multiplier. Over a month that is the difference between 433 and 2165 test cases, with no change in headcount or salary cost."</a:t>
             </a:r>
           </a:p>
         </p:txBody>
@@ -1988,7 +1988,7 @@
           </a:p>
           <a:p>
             <a:r>
-              <a:t>"Put another way: hitting 2165 test cases a month manually needs 5 QA analysts on payroll — RM25,000/month. QAPulse gets one analyst to the same output for RM5,000/month. That is RM20,000/month, or RM240,000/year, in avoided hiring cost for every QAPulse-equipped seat — and it scales linearly as the team grows."</a:t>
+              <a:t>"Put another way: hitting 2165 test cases a month manually needs 5 QA analysts on payroll — RM25,000/month. QM Pulse gets one analyst to the same output for RM5,000/month. That is RM20,000/month, or RM240,000/year, in avoided hiring cost for every QM Pulse-equipped seat — and it scales linearly as the team grows."</a:t>
             </a:r>
           </a:p>
         </p:txBody>
@@ -2063,7 +2063,7 @@
           </a:p>
           <a:p>
             <a:r>
-              <a:t>"This avoided cost is not a one-time event — it compounds every month QAPulse stays in use. By the end of year one, a single QAPulse seat has avoided RM240,000 in headcount cost that would otherwise have been needed to keep pace with the same testing volume."</a:t>
+              <a:t>"This avoided cost is not a one-time event — it compounds every month QM Pulse stays in use. By the end of year one, a single QM Pulse seat has avoided RM240,000 in headcount cost that would otherwise have been needed to keep pace with the same testing volume."</a:t>
             </a:r>
           </a:p>
         </p:txBody>
@@ -2138,7 +2138,7 @@
           </a:p>
           <a:p>
             <a:r>
-              <a:t>"The RM240,000 figure is only the headcount-avoidance piece — the part we can price precisely. QAPulse also compresses test design time by roughly 40%, turns multi-day PMO reporting cycles into under a minute, removes duplicate defect logging, and closes the traceability gaps that let defects slip into production. None of that is included in the RM240,000 number — it is upside on top."</a:t>
+              <a:t>"The RM240,000 figure is only the headcount-avoidance piece — the part we can price precisely. QM Pulse also compresses test design time by roughly 40%, turns multi-day PMO reporting cycles into under a minute, removes duplicate defect logging, and closes the traceability gaps that let defects slip into production. None of that is included in the RM240,000 number — it is upside on top."</a:t>
             </a:r>
           </a:p>
         </p:txBody>
@@ -2288,7 +2288,7 @@
           </a:p>
           <a:p>
             <a:r>
-              <a:t>"To close: this is not a projection built on hope, it is basic arithmetic on numbers we already observe today — 100 test cases a week manually versus 100 a day with QAPulse. We would like to validate the team-wide number with Finance and HR, then move to a short pilot to confirm it in the field. Thank you — happy to take questions."</a:t>
+              <a:t>"To close: this is not a projection built on hope, it is basic arithmetic on numbers we already observe today — 100 test cases a week manually versus 100 a day with QM Pulse. We would like to validate the team-wide number with Finance and HR, then move to a short pilot to confirm it in the field. Thank you — happy to take questions."</a:t>
             </a:r>
           </a:p>
         </p:txBody>
@@ -5468,7 +5468,7 @@
               </a:defRPr>
             </a:pPr>
             <a:r>
-              <a:t>QAPulse Return on Investment</a:t>
+              <a:t>QM Pulse Return on Investment</a:t>
             </a:r>
           </a:p>
           <a:p>
@@ -6076,7 +6076,7 @@
               </a:defRPr>
             </a:pPr>
             <a:r>
-              <a:t>Today's baseline QA throughput, before QAPulse, per tester.</a:t>
+              <a:t>Today's baseline QA throughput, before QM Pulse, per tester.</a:t>
             </a:r>
           </a:p>
         </p:txBody>
@@ -6636,7 +6636,7 @@
               </a:defRPr>
             </a:pPr>
             <a:r>
-              <a:t>THE QAPULSE SHIFT</a:t>
+              <a:t>THE QM PULSE SHIFT</a:t>
             </a:r>
           </a:p>
         </p:txBody>
@@ -7058,7 +7058,7 @@
               </a:defRPr>
             </a:pPr>
             <a:r>
-              <a:t>QAPulse: RM5,000 ÷ 2165 test cases/month</a:t>
+              <a:t>QM Pulse: RM5,000 ÷ 2165 test cases/month</a:t>
             </a:r>
           </a:p>
           <a:p>
@@ -7247,7 +7247,7 @@
               </a:defRPr>
             </a:pPr>
             <a:r>
-              <a:t>RM240,000 Avoided Per QAPulse Seat, Per Year</a:t>
+              <a:t>RM240,000 Avoided Per QM Pulse Seat, Per Year</a:t>
             </a:r>
           </a:p>
         </p:txBody>
@@ -7283,7 +7283,7 @@
               </a:defRPr>
             </a:pPr>
             <a:r>
-              <a:t>To manually match one QAPulse analyst's monthly output (2165 test cases), you would need 5 QA analysts.</a:t>
+              <a:t>To manually match one QM Pulse analyst's monthly output (2165 test cases), you would need 5 QA analysts.</a:t>
             </a:r>
           </a:p>
         </p:txBody>
@@ -7413,7 +7413,7 @@
               </a:defRPr>
             </a:pPr>
             <a:r>
-              <a:t>per QAPulse-equipped QA seat</a:t>
+              <a:t>per QM Pulse-equipped QA seat</a:t>
             </a:r>
           </a:p>
         </p:txBody>
@@ -7637,7 +7637,7 @@
               </a:defRPr>
             </a:pPr>
             <a:r>
-              <a:t>per QAPulse seat, compounding across the team</a:t>
+              <a:t>per QM Pulse seat, compounding across the team</a:t>
             </a:r>
           </a:p>
         </p:txBody>
@@ -7807,7 +7807,7 @@
               </a:defRPr>
             </a:pPr>
             <a:r>
-              <a:t>RM20,000/month in avoided headcount cost compounds to RM240,000 in year one, per QAPulse seat.</a:t>
+              <a:t>RM20,000/month in avoided headcount cost compounds to RM240,000 in year one, per QM Pulse seat.</a:t>
             </a:r>
           </a:p>
         </p:txBody>
@@ -7959,7 +7959,7 @@
               </a:defRPr>
             </a:pPr>
             <a:r>
-              <a:t>What Else QAPulse Saves Today</a:t>
+              <a:t>What Else QM Pulse Saves Today</a:t>
             </a:r>
           </a:p>
         </p:txBody>
@@ -8915,7 +8915,7 @@
                   <a:srgbClr val="14B8A6"/>
                 </a:solidFill>
               </a:rPr>
-              <a:t>QAPulse throughput:  </a:t>
+              <a:t>QM Pulse throughput:  </a:t>
             </a:r>
             <a:r>
               <a:rPr sz="1300">
@@ -8992,7 +8992,7 @@
                   <a:srgbClr val="F8FAFC"/>
                 </a:solidFill>
               </a:rPr>
-              <a:t>Extra manual FTEs needed to match QAPulse's monthly output, at the same RM5,000 salary each.</a:t>
+              <a:t>Extra manual FTEs needed to match QM Pulse's monthly output, at the same RM5,000 salary each.</a:t>
             </a:r>
           </a:p>
           <a:p>
@@ -9015,7 +9015,7 @@
                   <a:srgbClr val="F8FAFC"/>
                 </a:solidFill>
               </a:rPr>
-              <a:t>QAPulse licensing/build/hosting cost is not netted off — the figures above are gross value created, not net ROI %.</a:t>
+              <a:t>QM Pulse licensing/build/hosting cost is not netted off — the figures above are gross value created, not net ROI %.</a:t>
             </a:r>
           </a:p>
           <a:p>
@@ -9038,7 +9038,7 @@
                   <a:srgbClr val="F8FAFC"/>
                 </a:solidFill>
               </a:rPr>
-              <a:t>All figures are per QA seat — multiply by the number of QAPulse-equipped analysts for team- or department-wide impact.</a:t>
+              <a:t>All figures are per QA seat — multiply by the number of QM Pulse-equipped analysts for team- or department-wide impact.</a:t>
             </a:r>
           </a:p>
         </p:txBody>
@@ -9304,7 +9304,7 @@
               </a:defRPr>
             </a:pPr>
             <a:r>
-              <a:t>Every QA analyst equipped with QAPulse delivers the output of five, at one-fifth the cost per test case — worth RM240,000/year in avoided headcount alone, before counting faster test design, automated reporting, and full traceability.</a:t>
+              <a:t>Every QA analyst equipped with QM Pulse delivers the output of five, at one-fifth the cost per test case — worth RM240,000/year in avoided headcount alone, before counting faster test design, automated reporting, and full traceability.</a:t>
             </a:r>
           </a:p>
         </p:txBody>
